--- a/DCSM_EOS_Solution_Presentation.pptx
+++ b/DCSM_EOS_Solution_Presentation.pptx
@@ -3560,6 +3560,68 @@
           </a:p>
         </p:txBody>
       </p:sp>
+      <p:sp>
+        <p:nvSpPr>
+          <p:cNvPr id="31" name="Owner Tag"/>
+          <p:cNvSpPr/>
+          <p:nvPr/>
+        </p:nvSpPr>
+        <p:spPr>
+          <a:xfrm rot="10800000">
+            <a:off x="11506200" y="0"/>
+            <a:ext cx="685800" cy="685800"/>
+          </a:xfrm>
+          <a:prstGeom prst="rtTriangle">
+            <a:avLst/>
+          </a:prstGeom>
+          <a:solidFill>
+            <a:srgbClr val="1F4E8C"/>
+          </a:solidFill>
+          <a:ln>
+            <a:noFill/>
+          </a:ln>
+        </p:spPr>
+      </p:sp>
+      <p:sp>
+        <p:nvSpPr>
+          <p:cNvPr id="32" name="Owner Tag Text"/>
+          <p:cNvSpPr txBox="1"/>
+          <p:nvPr/>
+        </p:nvSpPr>
+        <p:spPr>
+          <a:xfrm rot="2700000">
+            <a:off x="11583924" y="160020"/>
+            <a:ext cx="731520" cy="164592"/>
+          </a:xfrm>
+          <a:prstGeom prst="rect">
+            <a:avLst/>
+          </a:prstGeom>
+          <a:noFill/>
+          <a:ln>
+            <a:noFill/>
+          </a:ln>
+        </p:spPr>
+        <p:txBody>
+          <a:bodyPr wrap="none" lIns="0" tIns="0" rIns="0" bIns="0" rtlCol="0" anchor="ctr"/>
+          <a:lstStyle/>
+          <a:p>
+            <a:pPr algn="ctr" indent="0" marL="0">
+              <a:buNone/>
+            </a:pPr>
+            <a:r>
+              <a:rPr lang="en-US" sz="1000" b="1" dirty="0">
+                <a:solidFill>
+                  <a:srgbClr val="FFFFFF"/>
+                </a:solidFill>
+                <a:latin typeface="Microsoft JhengHei" pitchFamily="34" charset="0"/>
+                <a:ea typeface="Microsoft JhengHei" pitchFamily="34" charset="-122"/>
+                <a:cs typeface="Microsoft JhengHei" pitchFamily="34" charset="-120"/>
+              </a:rPr>
+              <a:t>IT</a:t>
+            </a:r>
+          </a:p>
+        </p:txBody>
+      </p:sp>
     </p:spTree>
   </p:cSld>
   <p:clrMapOvr>
@@ -4095,6 +4157,68 @@
               <a:t>DCSM EOS 處理方案 · 11</a:t>
             </a:r>
             <a:endParaRPr lang="en-US" sz="1100" dirty="0"/>
+          </a:p>
+        </p:txBody>
+      </p:sp>
+      <p:sp>
+        <p:nvSpPr>
+          <p:cNvPr id="14" name="Owner Tag"/>
+          <p:cNvSpPr/>
+          <p:nvPr/>
+        </p:nvSpPr>
+        <p:spPr>
+          <a:xfrm rot="10800000">
+            <a:off x="11506200" y="0"/>
+            <a:ext cx="685800" cy="685800"/>
+          </a:xfrm>
+          <a:prstGeom prst="rtTriangle">
+            <a:avLst/>
+          </a:prstGeom>
+          <a:solidFill>
+            <a:srgbClr val="1F4E8C"/>
+          </a:solidFill>
+          <a:ln>
+            <a:noFill/>
+          </a:ln>
+        </p:spPr>
+      </p:sp>
+      <p:sp>
+        <p:nvSpPr>
+          <p:cNvPr id="15" name="Owner Tag Text"/>
+          <p:cNvSpPr txBox="1"/>
+          <p:nvPr/>
+        </p:nvSpPr>
+        <p:spPr>
+          <a:xfrm rot="2700000">
+            <a:off x="11583924" y="160020"/>
+            <a:ext cx="731520" cy="164592"/>
+          </a:xfrm>
+          <a:prstGeom prst="rect">
+            <a:avLst/>
+          </a:prstGeom>
+          <a:noFill/>
+          <a:ln>
+            <a:noFill/>
+          </a:ln>
+        </p:spPr>
+        <p:txBody>
+          <a:bodyPr wrap="none" lIns="0" tIns="0" rIns="0" bIns="0" rtlCol="0" anchor="ctr"/>
+          <a:lstStyle/>
+          <a:p>
+            <a:pPr algn="ctr" indent="0" marL="0">
+              <a:buNone/>
+            </a:pPr>
+            <a:r>
+              <a:rPr lang="en-US" sz="1000" b="1" dirty="0">
+                <a:solidFill>
+                  <a:srgbClr val="FFFFFF"/>
+                </a:solidFill>
+                <a:latin typeface="Microsoft JhengHei" pitchFamily="34" charset="0"/>
+                <a:ea typeface="Microsoft JhengHei" pitchFamily="34" charset="-122"/>
+                <a:cs typeface="Microsoft JhengHei" pitchFamily="34" charset="-120"/>
+              </a:rPr>
+              <a:t>IT</a:t>
+            </a:r>
           </a:p>
         </p:txBody>
       </p:sp>
@@ -5550,6 +5674,68 @@
               <a:t>DCSM EOS 處理方案 · 12</a:t>
             </a:r>
             <a:endParaRPr lang="en-US" sz="1100" dirty="0"/>
+          </a:p>
+        </p:txBody>
+      </p:sp>
+      <p:sp>
+        <p:nvSpPr>
+          <p:cNvPr id="14" name="Owner Tag"/>
+          <p:cNvSpPr/>
+          <p:nvPr/>
+        </p:nvSpPr>
+        <p:spPr>
+          <a:xfrm rot="10800000">
+            <a:off x="11506200" y="0"/>
+            <a:ext cx="685800" cy="685800"/>
+          </a:xfrm>
+          <a:prstGeom prst="rtTriangle">
+            <a:avLst/>
+          </a:prstGeom>
+          <a:solidFill>
+            <a:srgbClr val="1F4E8C"/>
+          </a:solidFill>
+          <a:ln>
+            <a:noFill/>
+          </a:ln>
+        </p:spPr>
+      </p:sp>
+      <p:sp>
+        <p:nvSpPr>
+          <p:cNvPr id="15" name="Owner Tag Text"/>
+          <p:cNvSpPr txBox="1"/>
+          <p:nvPr/>
+        </p:nvSpPr>
+        <p:spPr>
+          <a:xfrm rot="2700000">
+            <a:off x="11583924" y="160020"/>
+            <a:ext cx="731520" cy="164592"/>
+          </a:xfrm>
+          <a:prstGeom prst="rect">
+            <a:avLst/>
+          </a:prstGeom>
+          <a:noFill/>
+          <a:ln>
+            <a:noFill/>
+          </a:ln>
+        </p:spPr>
+        <p:txBody>
+          <a:bodyPr wrap="none" lIns="0" tIns="0" rIns="0" bIns="0" rtlCol="0" anchor="ctr"/>
+          <a:lstStyle/>
+          <a:p>
+            <a:pPr algn="ctr" indent="0" marL="0">
+              <a:buNone/>
+            </a:pPr>
+            <a:r>
+              <a:rPr lang="en-US" sz="1000" b="1" dirty="0">
+                <a:solidFill>
+                  <a:srgbClr val="FFFFFF"/>
+                </a:solidFill>
+                <a:latin typeface="Microsoft JhengHei" pitchFamily="34" charset="0"/>
+                <a:ea typeface="Microsoft JhengHei" pitchFamily="34" charset="-122"/>
+                <a:cs typeface="Microsoft JhengHei" pitchFamily="34" charset="-120"/>
+              </a:rPr>
+              <a:t>IT</a:t>
+            </a:r>
           </a:p>
         </p:txBody>
       </p:sp>
@@ -7417,6 +7603,68 @@
           </a:p>
         </p:txBody>
       </p:sp>
+      <p:sp>
+        <p:nvSpPr>
+          <p:cNvPr id="15" name="Owner Tag"/>
+          <p:cNvSpPr/>
+          <p:nvPr/>
+        </p:nvSpPr>
+        <p:spPr>
+          <a:xfrm rot="10800000">
+            <a:off x="11506200" y="0"/>
+            <a:ext cx="685800" cy="685800"/>
+          </a:xfrm>
+          <a:prstGeom prst="rtTriangle">
+            <a:avLst/>
+          </a:prstGeom>
+          <a:solidFill>
+            <a:srgbClr val="A85D0A"/>
+          </a:solidFill>
+          <a:ln>
+            <a:noFill/>
+          </a:ln>
+        </p:spPr>
+      </p:sp>
+      <p:sp>
+        <p:nvSpPr>
+          <p:cNvPr id="16" name="Owner Tag Text"/>
+          <p:cNvSpPr txBox="1"/>
+          <p:nvPr/>
+        </p:nvSpPr>
+        <p:spPr>
+          <a:xfrm rot="2700000">
+            <a:off x="11583924" y="160020"/>
+            <a:ext cx="731520" cy="164592"/>
+          </a:xfrm>
+          <a:prstGeom prst="rect">
+            <a:avLst/>
+          </a:prstGeom>
+          <a:noFill/>
+          <a:ln>
+            <a:noFill/>
+          </a:ln>
+        </p:spPr>
+        <p:txBody>
+          <a:bodyPr wrap="none" lIns="0" tIns="0" rIns="0" bIns="0" rtlCol="0" anchor="ctr"/>
+          <a:lstStyle/>
+          <a:p>
+            <a:pPr algn="ctr" indent="0" marL="0">
+              <a:buNone/>
+            </a:pPr>
+            <a:r>
+              <a:rPr lang="en-US" sz="1000" b="1" dirty="0">
+                <a:solidFill>
+                  <a:srgbClr val="FFFFFF"/>
+                </a:solidFill>
+                <a:latin typeface="Microsoft JhengHei" pitchFamily="34" charset="0"/>
+                <a:ea typeface="Microsoft JhengHei" pitchFamily="34" charset="-122"/>
+                <a:cs typeface="Microsoft JhengHei" pitchFamily="34" charset="-120"/>
+              </a:rPr>
+              <a:t>IT&amp;User</a:t>
+            </a:r>
+          </a:p>
+        </p:txBody>
+      </p:sp>
     </p:spTree>
   </p:cSld>
   <p:clrMapOvr>
@@ -8872,6 +9120,68 @@
           </a:p>
         </p:txBody>
       </p:sp>
+      <p:sp>
+        <p:nvSpPr>
+          <p:cNvPr id="16" name="Owner Tag"/>
+          <p:cNvSpPr/>
+          <p:nvPr/>
+        </p:nvSpPr>
+        <p:spPr>
+          <a:xfrm rot="10800000">
+            <a:off x="11506200" y="0"/>
+            <a:ext cx="685800" cy="685800"/>
+          </a:xfrm>
+          <a:prstGeom prst="rtTriangle">
+            <a:avLst/>
+          </a:prstGeom>
+          <a:solidFill>
+            <a:srgbClr val="A85D0A"/>
+          </a:solidFill>
+          <a:ln>
+            <a:noFill/>
+          </a:ln>
+        </p:spPr>
+      </p:sp>
+      <p:sp>
+        <p:nvSpPr>
+          <p:cNvPr id="17" name="Owner Tag Text"/>
+          <p:cNvSpPr txBox="1"/>
+          <p:nvPr/>
+        </p:nvSpPr>
+        <p:spPr>
+          <a:xfrm rot="2700000">
+            <a:off x="11583924" y="160020"/>
+            <a:ext cx="731520" cy="164592"/>
+          </a:xfrm>
+          <a:prstGeom prst="rect">
+            <a:avLst/>
+          </a:prstGeom>
+          <a:noFill/>
+          <a:ln>
+            <a:noFill/>
+          </a:ln>
+        </p:spPr>
+        <p:txBody>
+          <a:bodyPr wrap="none" lIns="0" tIns="0" rIns="0" bIns="0" rtlCol="0" anchor="ctr"/>
+          <a:lstStyle/>
+          <a:p>
+            <a:pPr algn="ctr" indent="0" marL="0">
+              <a:buNone/>
+            </a:pPr>
+            <a:r>
+              <a:rPr lang="en-US" sz="1000" b="1" dirty="0">
+                <a:solidFill>
+                  <a:srgbClr val="FFFFFF"/>
+                </a:solidFill>
+                <a:latin typeface="Microsoft JhengHei" pitchFamily="34" charset="0"/>
+                <a:ea typeface="Microsoft JhengHei" pitchFamily="34" charset="-122"/>
+                <a:cs typeface="Microsoft JhengHei" pitchFamily="34" charset="-120"/>
+              </a:rPr>
+              <a:t>IT&amp;User</a:t>
+            </a:r>
+          </a:p>
+        </p:txBody>
+      </p:sp>
     </p:spTree>
   </p:cSld>
   <p:clrMapOvr>
@@ -10327,6 +10637,68 @@
           </a:p>
         </p:txBody>
       </p:sp>
+      <p:sp>
+        <p:nvSpPr>
+          <p:cNvPr id="17" name="Owner Tag"/>
+          <p:cNvSpPr/>
+          <p:nvPr/>
+        </p:nvSpPr>
+        <p:spPr>
+          <a:xfrm rot="10800000">
+            <a:off x="11506200" y="0"/>
+            <a:ext cx="685800" cy="685800"/>
+          </a:xfrm>
+          <a:prstGeom prst="rtTriangle">
+            <a:avLst/>
+          </a:prstGeom>
+          <a:solidFill>
+            <a:srgbClr val="1F4E8C"/>
+          </a:solidFill>
+          <a:ln>
+            <a:noFill/>
+          </a:ln>
+        </p:spPr>
+      </p:sp>
+      <p:sp>
+        <p:nvSpPr>
+          <p:cNvPr id="18" name="Owner Tag Text"/>
+          <p:cNvSpPr txBox="1"/>
+          <p:nvPr/>
+        </p:nvSpPr>
+        <p:spPr>
+          <a:xfrm rot="2700000">
+            <a:off x="11583924" y="160020"/>
+            <a:ext cx="731520" cy="164592"/>
+          </a:xfrm>
+          <a:prstGeom prst="rect">
+            <a:avLst/>
+          </a:prstGeom>
+          <a:noFill/>
+          <a:ln>
+            <a:noFill/>
+          </a:ln>
+        </p:spPr>
+        <p:txBody>
+          <a:bodyPr wrap="none" lIns="0" tIns="0" rIns="0" bIns="0" rtlCol="0" anchor="ctr"/>
+          <a:lstStyle/>
+          <a:p>
+            <a:pPr algn="ctr" indent="0" marL="0">
+              <a:buNone/>
+            </a:pPr>
+            <a:r>
+              <a:rPr lang="en-US" sz="1000" b="1" dirty="0">
+                <a:solidFill>
+                  <a:srgbClr val="FFFFFF"/>
+                </a:solidFill>
+                <a:latin typeface="Microsoft JhengHei" pitchFamily="34" charset="0"/>
+                <a:ea typeface="Microsoft JhengHei" pitchFamily="34" charset="-122"/>
+                <a:cs typeface="Microsoft JhengHei" pitchFamily="34" charset="-120"/>
+              </a:rPr>
+              <a:t>IT</a:t>
+            </a:r>
+          </a:p>
+        </p:txBody>
+      </p:sp>
     </p:spTree>
   </p:cSld>
   <p:clrMapOvr>
@@ -10931,6 +11303,68 @@
               <a:t>DCSM EOS 處理方案 · 16</a:t>
             </a:r>
             <a:endParaRPr lang="en-US" sz="1100" dirty="0"/>
+          </a:p>
+        </p:txBody>
+      </p:sp>
+      <p:sp>
+        <p:nvSpPr>
+          <p:cNvPr id="13" name="Owner Tag"/>
+          <p:cNvSpPr/>
+          <p:nvPr/>
+        </p:nvSpPr>
+        <p:spPr>
+          <a:xfrm rot="10800000">
+            <a:off x="11506200" y="0"/>
+            <a:ext cx="685800" cy="685800"/>
+          </a:xfrm>
+          <a:prstGeom prst="rtTriangle">
+            <a:avLst/>
+          </a:prstGeom>
+          <a:solidFill>
+            <a:srgbClr val="A85D0A"/>
+          </a:solidFill>
+          <a:ln>
+            <a:noFill/>
+          </a:ln>
+        </p:spPr>
+      </p:sp>
+      <p:sp>
+        <p:nvSpPr>
+          <p:cNvPr id="14" name="Owner Tag Text"/>
+          <p:cNvSpPr txBox="1"/>
+          <p:nvPr/>
+        </p:nvSpPr>
+        <p:spPr>
+          <a:xfrm rot="2700000">
+            <a:off x="11583924" y="160020"/>
+            <a:ext cx="731520" cy="164592"/>
+          </a:xfrm>
+          <a:prstGeom prst="rect">
+            <a:avLst/>
+          </a:prstGeom>
+          <a:noFill/>
+          <a:ln>
+            <a:noFill/>
+          </a:ln>
+        </p:spPr>
+        <p:txBody>
+          <a:bodyPr wrap="none" lIns="0" tIns="0" rIns="0" bIns="0" rtlCol="0" anchor="ctr"/>
+          <a:lstStyle/>
+          <a:p>
+            <a:pPr algn="ctr" indent="0" marL="0">
+              <a:buNone/>
+            </a:pPr>
+            <a:r>
+              <a:rPr lang="en-US" sz="1000" b="1" dirty="0">
+                <a:solidFill>
+                  <a:srgbClr val="FFFFFF"/>
+                </a:solidFill>
+                <a:latin typeface="Microsoft JhengHei" pitchFamily="34" charset="0"/>
+                <a:ea typeface="Microsoft JhengHei" pitchFamily="34" charset="-122"/>
+                <a:cs typeface="Microsoft JhengHei" pitchFamily="34" charset="-120"/>
+              </a:rPr>
+              <a:t>IT&amp;User</a:t>
+            </a:r>
           </a:p>
         </p:txBody>
       </p:sp>
@@ -12289,6 +12723,68 @@
           </a:p>
         </p:txBody>
       </p:sp>
+      <p:sp>
+        <p:nvSpPr>
+          <p:cNvPr id="19" name="Owner Tag"/>
+          <p:cNvSpPr/>
+          <p:nvPr/>
+        </p:nvSpPr>
+        <p:spPr>
+          <a:xfrm rot="10800000">
+            <a:off x="11506200" y="0"/>
+            <a:ext cx="685800" cy="685800"/>
+          </a:xfrm>
+          <a:prstGeom prst="rtTriangle">
+            <a:avLst/>
+          </a:prstGeom>
+          <a:solidFill>
+            <a:srgbClr val="2E8A57"/>
+          </a:solidFill>
+          <a:ln>
+            <a:noFill/>
+          </a:ln>
+        </p:spPr>
+      </p:sp>
+      <p:sp>
+        <p:nvSpPr>
+          <p:cNvPr id="20" name="Owner Tag Text"/>
+          <p:cNvSpPr txBox="1"/>
+          <p:nvPr/>
+        </p:nvSpPr>
+        <p:spPr>
+          <a:xfrm rot="2700000">
+            <a:off x="11583924" y="160020"/>
+            <a:ext cx="731520" cy="164592"/>
+          </a:xfrm>
+          <a:prstGeom prst="rect">
+            <a:avLst/>
+          </a:prstGeom>
+          <a:noFill/>
+          <a:ln>
+            <a:noFill/>
+          </a:ln>
+        </p:spPr>
+        <p:txBody>
+          <a:bodyPr wrap="none" lIns="0" tIns="0" rIns="0" bIns="0" rtlCol="0" anchor="ctr"/>
+          <a:lstStyle/>
+          <a:p>
+            <a:pPr algn="ctr" indent="0" marL="0">
+              <a:buNone/>
+            </a:pPr>
+            <a:r>
+              <a:rPr lang="en-US" sz="1000" b="1" dirty="0">
+                <a:solidFill>
+                  <a:srgbClr val="FFFFFF"/>
+                </a:solidFill>
+                <a:latin typeface="Microsoft JhengHei" pitchFamily="34" charset="0"/>
+                <a:ea typeface="Microsoft JhengHei" pitchFamily="34" charset="-122"/>
+                <a:cs typeface="Microsoft JhengHei" pitchFamily="34" charset="-120"/>
+              </a:rPr>
+              <a:t>User</a:t>
+            </a:r>
+          </a:p>
+        </p:txBody>
+      </p:sp>
     </p:spTree>
   </p:cSld>
   <p:clrMapOvr>
@@ -13126,6 +13622,68 @@
           </a:p>
         </p:txBody>
       </p:sp>
+      <p:sp>
+        <p:nvSpPr>
+          <p:cNvPr id="25" name="Owner Tag"/>
+          <p:cNvSpPr/>
+          <p:nvPr/>
+        </p:nvSpPr>
+        <p:spPr>
+          <a:xfrm rot="10800000">
+            <a:off x="11506200" y="0"/>
+            <a:ext cx="685800" cy="685800"/>
+          </a:xfrm>
+          <a:prstGeom prst="rtTriangle">
+            <a:avLst/>
+          </a:prstGeom>
+          <a:solidFill>
+            <a:srgbClr val="1F4E8C"/>
+          </a:solidFill>
+          <a:ln>
+            <a:noFill/>
+          </a:ln>
+        </p:spPr>
+      </p:sp>
+      <p:sp>
+        <p:nvSpPr>
+          <p:cNvPr id="26" name="Owner Tag Text"/>
+          <p:cNvSpPr txBox="1"/>
+          <p:nvPr/>
+        </p:nvSpPr>
+        <p:spPr>
+          <a:xfrm rot="2700000">
+            <a:off x="11583924" y="160020"/>
+            <a:ext cx="731520" cy="164592"/>
+          </a:xfrm>
+          <a:prstGeom prst="rect">
+            <a:avLst/>
+          </a:prstGeom>
+          <a:noFill/>
+          <a:ln>
+            <a:noFill/>
+          </a:ln>
+        </p:spPr>
+        <p:txBody>
+          <a:bodyPr wrap="none" lIns="0" tIns="0" rIns="0" bIns="0" rtlCol="0" anchor="ctr"/>
+          <a:lstStyle/>
+          <a:p>
+            <a:pPr algn="ctr" indent="0" marL="0">
+              <a:buNone/>
+            </a:pPr>
+            <a:r>
+              <a:rPr lang="en-US" sz="1000" b="1" dirty="0">
+                <a:solidFill>
+                  <a:srgbClr val="FFFFFF"/>
+                </a:solidFill>
+                <a:latin typeface="Microsoft JhengHei" pitchFamily="34" charset="0"/>
+                <a:ea typeface="Microsoft JhengHei" pitchFamily="34" charset="-122"/>
+                <a:cs typeface="Microsoft JhengHei" pitchFamily="34" charset="-120"/>
+              </a:rPr>
+              <a:t>IT</a:t>
+            </a:r>
+          </a:p>
+        </p:txBody>
+      </p:sp>
     </p:spTree>
   </p:cSld>
   <p:clrMapOvr>
@@ -14852,6 +15410,68 @@
           </a:p>
         </p:txBody>
       </p:sp>
+      <p:sp>
+        <p:nvSpPr>
+          <p:cNvPr id="55" name="Owner Tag"/>
+          <p:cNvSpPr/>
+          <p:nvPr/>
+        </p:nvSpPr>
+        <p:spPr>
+          <a:xfrm rot="10800000">
+            <a:off x="11506200" y="0"/>
+            <a:ext cx="685800" cy="685800"/>
+          </a:xfrm>
+          <a:prstGeom prst="rtTriangle">
+            <a:avLst/>
+          </a:prstGeom>
+          <a:solidFill>
+            <a:srgbClr val="1F4E8C"/>
+          </a:solidFill>
+          <a:ln>
+            <a:noFill/>
+          </a:ln>
+        </p:spPr>
+      </p:sp>
+      <p:sp>
+        <p:nvSpPr>
+          <p:cNvPr id="56" name="Owner Tag Text"/>
+          <p:cNvSpPr txBox="1"/>
+          <p:nvPr/>
+        </p:nvSpPr>
+        <p:spPr>
+          <a:xfrm rot="2700000">
+            <a:off x="11583924" y="160020"/>
+            <a:ext cx="731520" cy="164592"/>
+          </a:xfrm>
+          <a:prstGeom prst="rect">
+            <a:avLst/>
+          </a:prstGeom>
+          <a:noFill/>
+          <a:ln>
+            <a:noFill/>
+          </a:ln>
+        </p:spPr>
+        <p:txBody>
+          <a:bodyPr wrap="none" lIns="0" tIns="0" rIns="0" bIns="0" rtlCol="0" anchor="ctr"/>
+          <a:lstStyle/>
+          <a:p>
+            <a:pPr algn="ctr" indent="0" marL="0">
+              <a:buNone/>
+            </a:pPr>
+            <a:r>
+              <a:rPr lang="en-US" sz="1000" b="1" dirty="0">
+                <a:solidFill>
+                  <a:srgbClr val="FFFFFF"/>
+                </a:solidFill>
+                <a:latin typeface="Microsoft JhengHei" pitchFamily="34" charset="0"/>
+                <a:ea typeface="Microsoft JhengHei" pitchFamily="34" charset="-122"/>
+                <a:cs typeface="Microsoft JhengHei" pitchFamily="34" charset="-120"/>
+              </a:rPr>
+              <a:t>IT</a:t>
+            </a:r>
+          </a:p>
+        </p:txBody>
+      </p:sp>
     </p:spTree>
   </p:cSld>
   <p:clrMapOvr>
@@ -15076,6 +15696,68 @@
               <a:t>DCSM EOS 處理方案 · 04</a:t>
             </a:r>
             <a:endParaRPr lang="en-US" sz="1100" dirty="0"/>
+          </a:p>
+        </p:txBody>
+      </p:sp>
+      <p:sp>
+        <p:nvSpPr>
+          <p:cNvPr id="7" name="Owner Tag"/>
+          <p:cNvSpPr/>
+          <p:nvPr/>
+        </p:nvSpPr>
+        <p:spPr>
+          <a:xfrm rot="10800000">
+            <a:off x="11506200" y="0"/>
+            <a:ext cx="685800" cy="685800"/>
+          </a:xfrm>
+          <a:prstGeom prst="rtTriangle">
+            <a:avLst/>
+          </a:prstGeom>
+          <a:solidFill>
+            <a:srgbClr val="A85D0A"/>
+          </a:solidFill>
+          <a:ln>
+            <a:noFill/>
+          </a:ln>
+        </p:spPr>
+      </p:sp>
+      <p:sp>
+        <p:nvSpPr>
+          <p:cNvPr id="8" name="Owner Tag Text"/>
+          <p:cNvSpPr txBox="1"/>
+          <p:nvPr/>
+        </p:nvSpPr>
+        <p:spPr>
+          <a:xfrm rot="2700000">
+            <a:off x="11583924" y="160020"/>
+            <a:ext cx="731520" cy="164592"/>
+          </a:xfrm>
+          <a:prstGeom prst="rect">
+            <a:avLst/>
+          </a:prstGeom>
+          <a:noFill/>
+          <a:ln>
+            <a:noFill/>
+          </a:ln>
+        </p:spPr>
+        <p:txBody>
+          <a:bodyPr wrap="none" lIns="0" tIns="0" rIns="0" bIns="0" rtlCol="0" anchor="ctr"/>
+          <a:lstStyle/>
+          <a:p>
+            <a:pPr algn="ctr" indent="0" marL="0">
+              <a:buNone/>
+            </a:pPr>
+            <a:r>
+              <a:rPr lang="en-US" sz="1000" b="1" dirty="0">
+                <a:solidFill>
+                  <a:srgbClr val="FFFFFF"/>
+                </a:solidFill>
+                <a:latin typeface="Microsoft JhengHei" pitchFamily="34" charset="0"/>
+                <a:ea typeface="Microsoft JhengHei" pitchFamily="34" charset="-122"/>
+                <a:cs typeface="Microsoft JhengHei" pitchFamily="34" charset="-120"/>
+              </a:rPr>
+              <a:t>IT&amp;User</a:t>
+            </a:r>
           </a:p>
         </p:txBody>
       </p:sp>
@@ -16534,6 +17216,68 @@
           </a:p>
         </p:txBody>
       </p:sp>
+      <p:sp>
+        <p:nvSpPr>
+          <p:cNvPr id="7" name="Owner Tag"/>
+          <p:cNvSpPr/>
+          <p:nvPr/>
+        </p:nvSpPr>
+        <p:spPr>
+          <a:xfrm rot="10800000">
+            <a:off x="11506200" y="0"/>
+            <a:ext cx="685800" cy="685800"/>
+          </a:xfrm>
+          <a:prstGeom prst="rtTriangle">
+            <a:avLst/>
+          </a:prstGeom>
+          <a:solidFill>
+            <a:srgbClr val="A85D0A"/>
+          </a:solidFill>
+          <a:ln>
+            <a:noFill/>
+          </a:ln>
+        </p:spPr>
+      </p:sp>
+      <p:sp>
+        <p:nvSpPr>
+          <p:cNvPr id="8" name="Owner Tag Text"/>
+          <p:cNvSpPr txBox="1"/>
+          <p:nvPr/>
+        </p:nvSpPr>
+        <p:spPr>
+          <a:xfrm rot="2700000">
+            <a:off x="11583924" y="160020"/>
+            <a:ext cx="731520" cy="164592"/>
+          </a:xfrm>
+          <a:prstGeom prst="rect">
+            <a:avLst/>
+          </a:prstGeom>
+          <a:noFill/>
+          <a:ln>
+            <a:noFill/>
+          </a:ln>
+        </p:spPr>
+        <p:txBody>
+          <a:bodyPr wrap="none" lIns="0" tIns="0" rIns="0" bIns="0" rtlCol="0" anchor="ctr"/>
+          <a:lstStyle/>
+          <a:p>
+            <a:pPr algn="ctr" indent="0" marL="0">
+              <a:buNone/>
+            </a:pPr>
+            <a:r>
+              <a:rPr lang="en-US" sz="1000" b="1" dirty="0">
+                <a:solidFill>
+                  <a:srgbClr val="FFFFFF"/>
+                </a:solidFill>
+                <a:latin typeface="Microsoft JhengHei" pitchFamily="34" charset="0"/>
+                <a:ea typeface="Microsoft JhengHei" pitchFamily="34" charset="-122"/>
+                <a:cs typeface="Microsoft JhengHei" pitchFamily="34" charset="-120"/>
+              </a:rPr>
+              <a:t>IT&amp;User</a:t>
+            </a:r>
+          </a:p>
+        </p:txBody>
+      </p:sp>
     </p:spTree>
   </p:cSld>
   <p:clrMapOvr>
@@ -17378,6 +18122,68 @@
           </a:p>
         </p:txBody>
       </p:sp>
+      <p:sp>
+        <p:nvSpPr>
+          <p:cNvPr id="25" name="Owner Tag"/>
+          <p:cNvSpPr/>
+          <p:nvPr/>
+        </p:nvSpPr>
+        <p:spPr>
+          <a:xfrm rot="10800000">
+            <a:off x="11506200" y="0"/>
+            <a:ext cx="685800" cy="685800"/>
+          </a:xfrm>
+          <a:prstGeom prst="rtTriangle">
+            <a:avLst/>
+          </a:prstGeom>
+          <a:solidFill>
+            <a:srgbClr val="A85D0A"/>
+          </a:solidFill>
+          <a:ln>
+            <a:noFill/>
+          </a:ln>
+        </p:spPr>
+      </p:sp>
+      <p:sp>
+        <p:nvSpPr>
+          <p:cNvPr id="26" name="Owner Tag Text"/>
+          <p:cNvSpPr txBox="1"/>
+          <p:nvPr/>
+        </p:nvSpPr>
+        <p:spPr>
+          <a:xfrm rot="2700000">
+            <a:off x="11583924" y="160020"/>
+            <a:ext cx="731520" cy="164592"/>
+          </a:xfrm>
+          <a:prstGeom prst="rect">
+            <a:avLst/>
+          </a:prstGeom>
+          <a:noFill/>
+          <a:ln>
+            <a:noFill/>
+          </a:ln>
+        </p:spPr>
+        <p:txBody>
+          <a:bodyPr wrap="none" lIns="0" tIns="0" rIns="0" bIns="0" rtlCol="0" anchor="ctr"/>
+          <a:lstStyle/>
+          <a:p>
+            <a:pPr algn="ctr" indent="0" marL="0">
+              <a:buNone/>
+            </a:pPr>
+            <a:r>
+              <a:rPr lang="en-US" sz="1000" b="1" dirty="0">
+                <a:solidFill>
+                  <a:srgbClr val="FFFFFF"/>
+                </a:solidFill>
+                <a:latin typeface="Microsoft JhengHei" pitchFamily="34" charset="0"/>
+                <a:ea typeface="Microsoft JhengHei" pitchFamily="34" charset="-122"/>
+                <a:cs typeface="Microsoft JhengHei" pitchFamily="34" charset="-120"/>
+              </a:rPr>
+              <a:t>IT&amp;User</a:t>
+            </a:r>
+          </a:p>
+        </p:txBody>
+      </p:sp>
     </p:spTree>
   </p:cSld>
   <p:clrMapOvr>
@@ -18166,6 +18972,68 @@
               <a:t>DCSM EOS 處理方案 · 07</a:t>
             </a:r>
             <a:endParaRPr lang="en-US" sz="1100" dirty="0"/>
+          </a:p>
+        </p:txBody>
+      </p:sp>
+      <p:sp>
+        <p:nvSpPr>
+          <p:cNvPr id="24" name="Owner Tag"/>
+          <p:cNvSpPr/>
+          <p:nvPr/>
+        </p:nvSpPr>
+        <p:spPr>
+          <a:xfrm rot="10800000">
+            <a:off x="11506200" y="0"/>
+            <a:ext cx="685800" cy="685800"/>
+          </a:xfrm>
+          <a:prstGeom prst="rtTriangle">
+            <a:avLst/>
+          </a:prstGeom>
+          <a:solidFill>
+            <a:srgbClr val="A85D0A"/>
+          </a:solidFill>
+          <a:ln>
+            <a:noFill/>
+          </a:ln>
+        </p:spPr>
+      </p:sp>
+      <p:sp>
+        <p:nvSpPr>
+          <p:cNvPr id="25" name="Owner Tag Text"/>
+          <p:cNvSpPr txBox="1"/>
+          <p:nvPr/>
+        </p:nvSpPr>
+        <p:spPr>
+          <a:xfrm rot="2700000">
+            <a:off x="11583924" y="160020"/>
+            <a:ext cx="731520" cy="164592"/>
+          </a:xfrm>
+          <a:prstGeom prst="rect">
+            <a:avLst/>
+          </a:prstGeom>
+          <a:noFill/>
+          <a:ln>
+            <a:noFill/>
+          </a:ln>
+        </p:spPr>
+        <p:txBody>
+          <a:bodyPr wrap="none" lIns="0" tIns="0" rIns="0" bIns="0" rtlCol="0" anchor="ctr"/>
+          <a:lstStyle/>
+          <a:p>
+            <a:pPr algn="ctr" indent="0" marL="0">
+              <a:buNone/>
+            </a:pPr>
+            <a:r>
+              <a:rPr lang="en-US" sz="1000" b="1" dirty="0">
+                <a:solidFill>
+                  <a:srgbClr val="FFFFFF"/>
+                </a:solidFill>
+                <a:latin typeface="Microsoft JhengHei" pitchFamily="34" charset="0"/>
+                <a:ea typeface="Microsoft JhengHei" pitchFamily="34" charset="-122"/>
+                <a:cs typeface="Microsoft JhengHei" pitchFamily="34" charset="-120"/>
+              </a:rPr>
+              <a:t>IT&amp;User</a:t>
+            </a:r>
           </a:p>
         </p:txBody>
       </p:sp>
@@ -19787,6 +20655,68 @@
           </a:p>
         </p:txBody>
       </p:sp>
+      <p:sp>
+        <p:nvSpPr>
+          <p:cNvPr id="10" name="Owner Tag"/>
+          <p:cNvSpPr/>
+          <p:nvPr/>
+        </p:nvSpPr>
+        <p:spPr>
+          <a:xfrm rot="10800000">
+            <a:off x="11506200" y="0"/>
+            <a:ext cx="685800" cy="685800"/>
+          </a:xfrm>
+          <a:prstGeom prst="rtTriangle">
+            <a:avLst/>
+          </a:prstGeom>
+          <a:solidFill>
+            <a:srgbClr val="1F4E8C"/>
+          </a:solidFill>
+          <a:ln>
+            <a:noFill/>
+          </a:ln>
+        </p:spPr>
+      </p:sp>
+      <p:sp>
+        <p:nvSpPr>
+          <p:cNvPr id="11" name="Owner Tag Text"/>
+          <p:cNvSpPr txBox="1"/>
+          <p:nvPr/>
+        </p:nvSpPr>
+        <p:spPr>
+          <a:xfrm rot="2700000">
+            <a:off x="11583924" y="160020"/>
+            <a:ext cx="731520" cy="164592"/>
+          </a:xfrm>
+          <a:prstGeom prst="rect">
+            <a:avLst/>
+          </a:prstGeom>
+          <a:noFill/>
+          <a:ln>
+            <a:noFill/>
+          </a:ln>
+        </p:spPr>
+        <p:txBody>
+          <a:bodyPr wrap="none" lIns="0" tIns="0" rIns="0" bIns="0" rtlCol="0" anchor="ctr"/>
+          <a:lstStyle/>
+          <a:p>
+            <a:pPr algn="ctr" indent="0" marL="0">
+              <a:buNone/>
+            </a:pPr>
+            <a:r>
+              <a:rPr lang="en-US" sz="1000" b="1" dirty="0">
+                <a:solidFill>
+                  <a:srgbClr val="FFFFFF"/>
+                </a:solidFill>
+                <a:latin typeface="Microsoft JhengHei" pitchFamily="34" charset="0"/>
+                <a:ea typeface="Microsoft JhengHei" pitchFamily="34" charset="-122"/>
+                <a:cs typeface="Microsoft JhengHei" pitchFamily="34" charset="-120"/>
+              </a:rPr>
+              <a:t>IT</a:t>
+            </a:r>
+          </a:p>
+        </p:txBody>
+      </p:sp>
     </p:spTree>
   </p:cSld>
   <p:clrMapOvr>
@@ -20803,6 +21733,68 @@
               <a:t>DCSM EOS 處理方案 · 09</a:t>
             </a:r>
             <a:endParaRPr lang="en-US" sz="1100" dirty="0"/>
+          </a:p>
+        </p:txBody>
+      </p:sp>
+      <p:sp>
+        <p:nvSpPr>
+          <p:cNvPr id="11" name="Owner Tag"/>
+          <p:cNvSpPr/>
+          <p:nvPr/>
+        </p:nvSpPr>
+        <p:spPr>
+          <a:xfrm rot="10800000">
+            <a:off x="11506200" y="0"/>
+            <a:ext cx="685800" cy="685800"/>
+          </a:xfrm>
+          <a:prstGeom prst="rtTriangle">
+            <a:avLst/>
+          </a:prstGeom>
+          <a:solidFill>
+            <a:srgbClr val="1F4E8C"/>
+          </a:solidFill>
+          <a:ln>
+            <a:noFill/>
+          </a:ln>
+        </p:spPr>
+      </p:sp>
+      <p:sp>
+        <p:nvSpPr>
+          <p:cNvPr id="12" name="Owner Tag Text"/>
+          <p:cNvSpPr txBox="1"/>
+          <p:nvPr/>
+        </p:nvSpPr>
+        <p:spPr>
+          <a:xfrm rot="2700000">
+            <a:off x="11583924" y="160020"/>
+            <a:ext cx="731520" cy="164592"/>
+          </a:xfrm>
+          <a:prstGeom prst="rect">
+            <a:avLst/>
+          </a:prstGeom>
+          <a:noFill/>
+          <a:ln>
+            <a:noFill/>
+          </a:ln>
+        </p:spPr>
+        <p:txBody>
+          <a:bodyPr wrap="none" lIns="0" tIns="0" rIns="0" bIns="0" rtlCol="0" anchor="ctr"/>
+          <a:lstStyle/>
+          <a:p>
+            <a:pPr algn="ctr" indent="0" marL="0">
+              <a:buNone/>
+            </a:pPr>
+            <a:r>
+              <a:rPr lang="en-US" sz="1000" b="1" dirty="0">
+                <a:solidFill>
+                  <a:srgbClr val="FFFFFF"/>
+                </a:solidFill>
+                <a:latin typeface="Microsoft JhengHei" pitchFamily="34" charset="0"/>
+                <a:ea typeface="Microsoft JhengHei" pitchFamily="34" charset="-122"/>
+                <a:cs typeface="Microsoft JhengHei" pitchFamily="34" charset="-120"/>
+              </a:rPr>
+              <a:t>IT</a:t>
+            </a:r>
           </a:p>
         </p:txBody>
       </p:sp>
